--- a/Schulabschluss_DataStory_Praesentation.pptx
+++ b/Schulabschluss_DataStory_Praesentation.pptx
@@ -4778,8 +4778,8 @@
         </p:blipFill>
         <p:spPr>
           <a:xfrm>
-            <a:off x="5989320" y="2083765"/>
-            <a:ext cx="5943600" cy="3879189"/>
+            <a:off x="5989320" y="2380413"/>
+            <a:ext cx="5943600" cy="3285892"/>
           </a:xfrm>
           <a:prstGeom prst="rect">
             <a:avLst/>
